--- a/portfolio/portfolio.pptx
+++ b/portfolio/portfolio.pptx
@@ -5,7 +5,7 @@
     <p:sldMasterId id="2147483648" r:id="rId1"/>
   </p:sldMasterIdLst>
   <p:notesMasterIdLst>
-    <p:notesMasterId r:id="rId16"/>
+    <p:notesMasterId r:id="rId17"/>
   </p:notesMasterIdLst>
   <p:sldIdLst>
     <p:sldId id="256" r:id="rId2"/>
@@ -21,7 +21,8 @@
     <p:sldId id="266" r:id="rId12"/>
     <p:sldId id="267" r:id="rId13"/>
     <p:sldId id="268" r:id="rId14"/>
-    <p:sldId id="269" r:id="rId15"/>
+    <p:sldId id="270" r:id="rId15"/>
+    <p:sldId id="269" r:id="rId16"/>
   </p:sldIdLst>
   <p:sldSz cx="9144000" cy="5143500" type="screen16x9"/>
   <p:notesSz cx="5143500" cy="9144000"/>
@@ -120,6 +121,11 @@
       </a:defRPr>
     </a:lvl9pPr>
   </p:defaultTextStyle>
+  <p:extLst>
+    <p:ext uri="{EFAFB233-063F-42B5-8137-9DF3F51BA10A}">
+      <p15:sldGuideLst xmlns:p15="http://schemas.microsoft.com/office/powerpoint/2012/main"/>
+    </p:ext>
+  </p:extLst>
 </p:presentation>
 </file>
 
@@ -1618,6 +1624,98 @@
       </p:grpSpPr>
       <p:sp>
         <p:nvSpPr>
+          <p:cNvPr id="2" name="Slide Image Placeholder 1"/>
+          <p:cNvSpPr>
+            <a:spLocks noGrp="1" noRot="1" noChangeAspect="1"/>
+          </p:cNvSpPr>
+          <p:nvPr>
+            <p:ph type="sldImg"/>
+          </p:nvPr>
+        </p:nvSpPr>
+        <p:spPr>
+          <a:xfrm>
+            <a:off x="217488" y="812800"/>
+            <a:ext cx="7124700" cy="4008438"/>
+          </a:xfrm>
+        </p:spPr>
+      </p:sp>
+      <p:sp>
+        <p:nvSpPr>
+          <p:cNvPr id="3" name="Notes Placeholder 2"/>
+          <p:cNvSpPr>
+            <a:spLocks noGrp="1"/>
+          </p:cNvSpPr>
+          <p:nvPr>
+            <p:ph type="body" idx="1"/>
+          </p:nvPr>
+        </p:nvSpPr>
+        <p:spPr/>
+        <p:txBody>
+          <a:bodyPr/>
+          <a:lstStyle/>
+          <a:p>
+            <a:r>
+              <a:rPr lang="en-US" dirty="0"/>
+              <a:t>실험 2(링 vs 가변)의 실제 디버깅 경험. ① char buffer[512]로 줄였으나 4096 하드코딩 상한이 남아 크래시 → BUFFER_SIZE 단일 상수화(현재 4068)로 해결. ② 초기 MapSnapshot이 512B 초과 → 고정 링 버퍼 상한에 걸려 맵 일부만 로딩. VectorBuffer는 resize(512) 시작 후 Reserve로 grow하여 통과. '최악의 경우 어떻게 무너지는가'라는 실험 2 결론과 연결.</a:t>
+            </a:r>
+          </a:p>
+        </p:txBody>
+      </p:sp>
+      <p:sp>
+        <p:nvSpPr>
+          <p:cNvPr id="4" name="Slide Number Placeholder 3"/>
+          <p:cNvSpPr>
+            <a:spLocks noGrp="1"/>
+          </p:cNvSpPr>
+          <p:nvPr>
+            <p:ph type="sldNum" sz="quarter" idx="10"/>
+          </p:nvPr>
+        </p:nvSpPr>
+        <p:spPr/>
+        <p:txBody>
+          <a:bodyPr/>
+          <a:lstStyle/>
+          <a:p>
+            <a:fld id="{F7021451-1387-4CA6-816F-3879F97B5CBC}" type="slidenum">
+              <a:rPr lang="en-US"/>
+              <a:t>14</a:t>
+            </a:fld>
+            <a:endParaRPr lang="en-US"/>
+          </a:p>
+        </p:txBody>
+      </p:sp>
+    </p:spTree>
+    <p:extLst>
+      <p:ext uri="{BB962C8B-B14F-4D97-AF65-F5344CB8AC3E}">
+        <p14:creationId xmlns:p14="http://schemas.microsoft.com/office/powerpoint/2010/main" val="1024086991"/>
+      </p:ext>
+    </p:extLst>
+  </p:cSld>
+  <p:clrMapOvr>
+    <a:masterClrMapping/>
+  </p:clrMapOvr>
+</p:notes>
+</file>
+
+<file path=ppt/notesSlides/notesSlide14.xml><?xml version="1.0" encoding="utf-8"?>
+<p:notes xmlns:a="http://schemas.openxmlformats.org/drawingml/2006/main" xmlns:r="http://schemas.openxmlformats.org/officeDocument/2006/relationships" xmlns:p="http://schemas.openxmlformats.org/presentationml/2006/main">
+  <p:cSld>
+    <p:spTree>
+      <p:nvGrpSpPr>
+        <p:cNvPr id="1" name=""/>
+        <p:cNvGrpSpPr/>
+        <p:nvPr/>
+      </p:nvGrpSpPr>
+      <p:grpSpPr>
+        <a:xfrm>
+          <a:off x="0" y="0"/>
+          <a:ext cx="0" cy="0"/>
+          <a:chOff x="0" y="0"/>
+          <a:chExt cx="0" cy="0"/>
+        </a:xfrm>
+      </p:grpSpPr>
+      <p:sp>
+        <p:nvSpPr>
           <p:cNvPr id="302" name="PlaceHolder 1"/>
           <p:cNvSpPr>
             <a:spLocks noGrp="1" noRot="1" noChangeAspect="1"/>
@@ -1802,7 +1900,7 @@
                 <a:latin typeface="+mn-lt"/>
                 <a:ea typeface="+mn-ea"/>
               </a:rPr>
-              <a:t>14</a:t>
+              <a:t>15</a:t>
             </a:fld>
             <a:endParaRPr lang="en-US" sz="1800" b="0" u="none" strike="noStrike">
               <a:solidFill>
@@ -13743,6 +13841,863 @@
 <file path=ppt/slides/slide14.xml><?xml version="1.0" encoding="utf-8"?>
 <p:sld xmlns:a="http://schemas.openxmlformats.org/drawingml/2006/main" xmlns:r="http://schemas.openxmlformats.org/officeDocument/2006/relationships" xmlns:p="http://schemas.openxmlformats.org/presentationml/2006/main">
   <p:cSld>
+    <p:spTree>
+      <p:nvGrpSpPr>
+        <p:cNvPr id="1" name=""/>
+        <p:cNvGrpSpPr/>
+        <p:nvPr/>
+      </p:nvGrpSpPr>
+      <p:grpSpPr>
+        <a:xfrm>
+          <a:off x="0" y="0"/>
+          <a:ext cx="0" cy="0"/>
+          <a:chOff x="0" y="0"/>
+          <a:chExt cx="0" cy="0"/>
+        </a:xfrm>
+      </p:grpSpPr>
+      <p:sp>
+        <p:nvSpPr>
+          <p:cNvPr id="2" name="Text 0"/>
+          <p:cNvSpPr/>
+          <p:nvPr/>
+        </p:nvSpPr>
+        <p:spPr>
+          <a:xfrm>
+            <a:off x="548640" y="384048"/>
+            <a:ext cx="8046720" cy="274320"/>
+          </a:xfrm>
+          <a:prstGeom prst="rect">
+            <a:avLst/>
+          </a:prstGeom>
+          <a:noFill/>
+          <a:ln/>
+        </p:spPr>
+        <p:txBody>
+          <a:bodyPr wrap="square" lIns="0" tIns="0" rIns="0" bIns="0" rtlCol="0" anchor="ctr"/>
+          <a:lstStyle/>
+          <a:p>
+            <a:pPr marL="0" indent="0">
+              <a:buNone/>
+            </a:pPr>
+            <a:r>
+              <a:rPr lang="en-US" sz="1200" b="1" kern="0" spc="200" dirty="0">
+                <a:solidFill>
+                  <a:srgbClr val="0E8F84"/>
+                </a:solidFill>
+                <a:latin typeface="맑은 고딕" pitchFamily="34" charset="0"/>
+                <a:ea typeface="맑은 고딕" pitchFamily="34" charset="-122"/>
+                <a:cs typeface="맑은 고딕" pitchFamily="34" charset="-120"/>
+              </a:rPr>
+              <a:t>TROUBLE SHOOTING · RECV BUFFER</a:t>
+            </a:r>
+            <a:endParaRPr lang="en-US" sz="1200" dirty="0"/>
+          </a:p>
+        </p:txBody>
+      </p:sp>
+      <p:sp>
+        <p:nvSpPr>
+          <p:cNvPr id="3" name="Text 1"/>
+          <p:cNvSpPr/>
+          <p:nvPr/>
+        </p:nvSpPr>
+        <p:spPr>
+          <a:xfrm>
+            <a:off x="548640" y="658368"/>
+            <a:ext cx="8046720" cy="566928"/>
+          </a:xfrm>
+          <a:prstGeom prst="rect">
+            <a:avLst/>
+          </a:prstGeom>
+          <a:noFill/>
+          <a:ln/>
+        </p:spPr>
+        <p:txBody>
+          <a:bodyPr wrap="square" lIns="0" tIns="0" rIns="0" bIns="0" rtlCol="0" anchor="ctr"/>
+          <a:lstStyle/>
+          <a:p>
+            <a:pPr marL="0" indent="0">
+              <a:buNone/>
+            </a:pPr>
+            <a:r>
+              <a:rPr lang="en-US" sz="2700" b="1" dirty="0">
+                <a:solidFill>
+                  <a:srgbClr val="1E293B"/>
+                </a:solidFill>
+                <a:latin typeface="맑은 고딕" pitchFamily="34" charset="0"/>
+                <a:ea typeface="맑은 고딕" pitchFamily="34" charset="-122"/>
+                <a:cs typeface="맑은 고딕" pitchFamily="34" charset="-120"/>
+              </a:rPr>
+              <a:t>트러블슈팅 — 링 버퍼 크기 불일치 디버깅</a:t>
+            </a:r>
+            <a:endParaRPr lang="en-US" sz="2700" dirty="0"/>
+          </a:p>
+        </p:txBody>
+      </p:sp>
+      <p:sp>
+        <p:nvSpPr>
+          <p:cNvPr id="4" name="Text 2"/>
+          <p:cNvSpPr/>
+          <p:nvPr/>
+        </p:nvSpPr>
+        <p:spPr>
+          <a:xfrm>
+            <a:off x="548640" y="1280160"/>
+            <a:ext cx="8046720" cy="320040"/>
+          </a:xfrm>
+          <a:prstGeom prst="rect">
+            <a:avLst/>
+          </a:prstGeom>
+          <a:noFill/>
+          <a:ln/>
+        </p:spPr>
+        <p:txBody>
+          <a:bodyPr wrap="square" lIns="0" tIns="0" rIns="0" bIns="0" rtlCol="0" anchor="ctr"/>
+          <a:lstStyle/>
+          <a:p>
+            <a:pPr marL="0" indent="0">
+              <a:buNone/>
+            </a:pPr>
+            <a:r>
+              <a:rPr lang="en-US" sz="1450" dirty="0">
+                <a:solidFill>
+                  <a:srgbClr val="3A4A5C"/>
+                </a:solidFill>
+                <a:latin typeface="맑은 고딕" pitchFamily="34" charset="0"/>
+                <a:ea typeface="맑은 고딕" pitchFamily="34" charset="-122"/>
+                <a:cs typeface="맑은 고딕" pitchFamily="34" charset="-120"/>
+              </a:rPr>
+              <a:t>링 버퍼와 가변 버퍼를 같은 512 크기로 맞춰 비교하던 중, 링 버퍼에서만 두 문제가 연달아 발생했습니다.</a:t>
+            </a:r>
+            <a:endParaRPr lang="en-US" sz="1450" dirty="0"/>
+          </a:p>
+        </p:txBody>
+      </p:sp>
+      <p:sp>
+        <p:nvSpPr>
+          <p:cNvPr id="5" name="Shape 3"/>
+          <p:cNvSpPr/>
+          <p:nvPr/>
+        </p:nvSpPr>
+        <p:spPr>
+          <a:xfrm>
+            <a:off x="548640" y="1737360"/>
+            <a:ext cx="3913632" cy="2395728"/>
+          </a:xfrm>
+          <a:prstGeom prst="roundRect">
+            <a:avLst>
+              <a:gd name="adj" fmla="val 2290"/>
+            </a:avLst>
+          </a:prstGeom>
+          <a:solidFill>
+            <a:srgbClr val="FFFFFF"/>
+          </a:solidFill>
+          <a:ln w="12700">
+            <a:solidFill>
+              <a:srgbClr val="D5DDE5"/>
+            </a:solidFill>
+            <a:prstDash val="solid"/>
+          </a:ln>
+          <a:effectLst>
+            <a:outerShdw blurRad="88900" dist="38100" dir="5400000" algn="bl" rotWithShape="0">
+              <a:srgbClr val="000000">
+                <a:alpha val="10000"/>
+              </a:srgbClr>
+            </a:outerShdw>
+          </a:effectLst>
+        </p:spPr>
+        <p:txBody>
+          <a:bodyPr/>
+          <a:lstStyle/>
+          <a:p>
+            <a:endParaRPr lang="ko-KR" altLang="en-US"/>
+          </a:p>
+        </p:txBody>
+      </p:sp>
+      <p:sp>
+        <p:nvSpPr>
+          <p:cNvPr id="6" name="Shape 4"/>
+          <p:cNvSpPr/>
+          <p:nvPr/>
+        </p:nvSpPr>
+        <p:spPr>
+          <a:xfrm>
+            <a:off x="768096" y="1938528"/>
+            <a:ext cx="310896" cy="310896"/>
+          </a:xfrm>
+          <a:prstGeom prst="ellipse">
+            <a:avLst/>
+          </a:prstGeom>
+          <a:solidFill>
+            <a:srgbClr val="0B6F66"/>
+          </a:solidFill>
+          <a:ln/>
+        </p:spPr>
+        <p:txBody>
+          <a:bodyPr/>
+          <a:lstStyle/>
+          <a:p>
+            <a:endParaRPr lang="ko-KR" altLang="en-US"/>
+          </a:p>
+        </p:txBody>
+      </p:sp>
+      <p:sp>
+        <p:nvSpPr>
+          <p:cNvPr id="7" name="Text 5"/>
+          <p:cNvSpPr/>
+          <p:nvPr/>
+        </p:nvSpPr>
+        <p:spPr>
+          <a:xfrm>
+            <a:off x="768096" y="1938528"/>
+            <a:ext cx="310896" cy="310896"/>
+          </a:xfrm>
+          <a:prstGeom prst="rect">
+            <a:avLst/>
+          </a:prstGeom>
+          <a:noFill/>
+          <a:ln/>
+        </p:spPr>
+        <p:txBody>
+          <a:bodyPr wrap="square" lIns="0" tIns="0" rIns="0" bIns="0" rtlCol="0" anchor="ctr"/>
+          <a:lstStyle/>
+          <a:p>
+            <a:pPr marL="0" indent="0" algn="ctr">
+              <a:buNone/>
+            </a:pPr>
+            <a:r>
+              <a:rPr lang="en-US" sz="1300" b="1" dirty="0">
+                <a:solidFill>
+                  <a:srgbClr val="FFFFFF"/>
+                </a:solidFill>
+                <a:latin typeface="맑은 고딕" pitchFamily="34" charset="0"/>
+                <a:ea typeface="맑은 고딕" pitchFamily="34" charset="-122"/>
+                <a:cs typeface="맑은 고딕" pitchFamily="34" charset="-120"/>
+              </a:rPr>
+              <a:t>1</a:t>
+            </a:r>
+            <a:endParaRPr lang="en-US" sz="1300" dirty="0"/>
+          </a:p>
+        </p:txBody>
+      </p:sp>
+      <p:sp>
+        <p:nvSpPr>
+          <p:cNvPr id="8" name="Text 6"/>
+          <p:cNvSpPr/>
+          <p:nvPr/>
+        </p:nvSpPr>
+        <p:spPr>
+          <a:xfrm>
+            <a:off x="1170432" y="1920240"/>
+            <a:ext cx="3090672" cy="310896"/>
+          </a:xfrm>
+          <a:prstGeom prst="rect">
+            <a:avLst/>
+          </a:prstGeom>
+          <a:noFill/>
+          <a:ln/>
+        </p:spPr>
+        <p:txBody>
+          <a:bodyPr wrap="square" lIns="0" tIns="0" rIns="0" bIns="0" rtlCol="0" anchor="ctr"/>
+          <a:lstStyle/>
+          <a:p>
+            <a:pPr marL="0" indent="0">
+              <a:buNone/>
+            </a:pPr>
+            <a:r>
+              <a:rPr lang="en-US" sz="1500" b="1" dirty="0">
+                <a:solidFill>
+                  <a:srgbClr val="1E293B"/>
+                </a:solidFill>
+                <a:latin typeface="맑은 고딕" pitchFamily="34" charset="0"/>
+                <a:ea typeface="맑은 고딕" pitchFamily="34" charset="-122"/>
+                <a:cs typeface="맑은 고딕" pitchFamily="34" charset="-120"/>
+              </a:rPr>
+              <a:t>링 버퍼에서만 크래시</a:t>
+            </a:r>
+            <a:endParaRPr lang="en-US" sz="1500" dirty="0"/>
+          </a:p>
+        </p:txBody>
+      </p:sp>
+      <p:sp>
+        <p:nvSpPr>
+          <p:cNvPr id="9" name="Text 7"/>
+          <p:cNvSpPr/>
+          <p:nvPr/>
+        </p:nvSpPr>
+        <p:spPr>
+          <a:xfrm>
+            <a:off x="1170432" y="2231136"/>
+            <a:ext cx="3090672" cy="219456"/>
+          </a:xfrm>
+          <a:prstGeom prst="rect">
+            <a:avLst/>
+          </a:prstGeom>
+          <a:noFill/>
+          <a:ln/>
+        </p:spPr>
+        <p:txBody>
+          <a:bodyPr wrap="square" lIns="0" tIns="0" rIns="0" bIns="0" rtlCol="0" anchor="ctr"/>
+          <a:lstStyle/>
+          <a:p>
+            <a:pPr marL="0" indent="0">
+              <a:buNone/>
+            </a:pPr>
+            <a:r>
+              <a:rPr lang="en-US" sz="1050" dirty="0">
+                <a:solidFill>
+                  <a:srgbClr val="6B7A8D"/>
+                </a:solidFill>
+                <a:latin typeface="Consolas" pitchFamily="34" charset="0"/>
+                <a:ea typeface="Consolas" pitchFamily="34" charset="-122"/>
+                <a:cs typeface="Consolas" pitchFamily="34" charset="-120"/>
+              </a:rPr>
+              <a:t>RingBuffer · buffer[512]</a:t>
+            </a:r>
+            <a:endParaRPr lang="en-US" sz="1050" dirty="0"/>
+          </a:p>
+        </p:txBody>
+      </p:sp>
+      <p:sp>
+        <p:nvSpPr>
+          <p:cNvPr id="10" name="Text 8"/>
+          <p:cNvSpPr/>
+          <p:nvPr/>
+        </p:nvSpPr>
+        <p:spPr>
+          <a:xfrm>
+            <a:off x="804672" y="2560320"/>
+            <a:ext cx="3401568" cy="1444752"/>
+          </a:xfrm>
+          <a:prstGeom prst="rect">
+            <a:avLst/>
+          </a:prstGeom>
+          <a:noFill/>
+          <a:ln/>
+        </p:spPr>
+        <p:txBody>
+          <a:bodyPr wrap="square" lIns="0" tIns="0" rIns="0" bIns="0" rtlCol="0" anchor="t"/>
+          <a:lstStyle/>
+          <a:p>
+            <a:pPr marL="0" indent="0">
+              <a:lnSpc>
+                <a:spcPct val="105000"/>
+              </a:lnSpc>
+              <a:buNone/>
+            </a:pPr>
+            <a:r>
+              <a:rPr lang="en-US" sz="1100" b="1" dirty="0">
+                <a:solidFill>
+                  <a:srgbClr val="B0413A"/>
+                </a:solidFill>
+                <a:latin typeface="맑은 고딕" pitchFamily="34" charset="0"/>
+                <a:ea typeface="맑은 고딕" pitchFamily="34" charset="-122"/>
+                <a:cs typeface="맑은 고딕" pitchFamily="34" charset="-120"/>
+              </a:rPr>
+              <a:t>증상  </a:t>
+            </a:r>
+            <a:r>
+              <a:rPr lang="en-US" sz="1100" dirty="0">
+                <a:solidFill>
+                  <a:srgbClr val="3A4A5C"/>
+                </a:solidFill>
+                <a:latin typeface="맑은 고딕" pitchFamily="34" charset="0"/>
+                <a:ea typeface="맑은 고딕" pitchFamily="34" charset="-122"/>
+                <a:cs typeface="맑은 고딕" pitchFamily="34" charset="-120"/>
+              </a:rPr>
+              <a:t>두 버퍼를 같은 512로 맞추자 가변 버퍼는 정상, 링 버퍼만 크래시</a:t>
+            </a:r>
+            <a:endParaRPr lang="en-US" sz="1100" dirty="0"/>
+          </a:p>
+          <a:p>
+            <a:pPr marL="0" indent="0">
+              <a:lnSpc>
+                <a:spcPct val="105000"/>
+              </a:lnSpc>
+              <a:buNone/>
+            </a:pPr>
+            <a:r>
+              <a:rPr lang="en-US" sz="1100" b="1" dirty="0">
+                <a:solidFill>
+                  <a:srgbClr val="1E293B"/>
+                </a:solidFill>
+                <a:latin typeface="맑은 고딕" pitchFamily="34" charset="0"/>
+                <a:ea typeface="맑은 고딕" pitchFamily="34" charset="-122"/>
+                <a:cs typeface="맑은 고딕" pitchFamily="34" charset="-120"/>
+              </a:rPr>
+              <a:t>원인  </a:t>
+            </a:r>
+            <a:r>
+              <a:rPr lang="en-US" sz="1100" dirty="0">
+                <a:solidFill>
+                  <a:srgbClr val="3A4A5C"/>
+                </a:solidFill>
+                <a:latin typeface="맑은 고딕" pitchFamily="34" charset="0"/>
+                <a:ea typeface="맑은 고딕" pitchFamily="34" charset="-122"/>
+                <a:cs typeface="맑은 고딕" pitchFamily="34" charset="-120"/>
+              </a:rPr>
+              <a:t>배열은 buffer[512]로 줄였지만 크기 상한이 4096으로 하드코딩된 채 남아 인덱스 범위 불일치</a:t>
+            </a:r>
+            <a:endParaRPr lang="en-US" sz="1100" dirty="0"/>
+          </a:p>
+          <a:p>
+            <a:pPr marL="0" indent="0">
+              <a:lnSpc>
+                <a:spcPct val="105000"/>
+              </a:lnSpc>
+              <a:buNone/>
+            </a:pPr>
+            <a:r>
+              <a:rPr lang="en-US" sz="1100" b="1" dirty="0">
+                <a:solidFill>
+                  <a:srgbClr val="0B6F66"/>
+                </a:solidFill>
+                <a:latin typeface="맑은 고딕" pitchFamily="34" charset="0"/>
+                <a:ea typeface="맑은 고딕" pitchFamily="34" charset="-122"/>
+                <a:cs typeface="맑은 고딕" pitchFamily="34" charset="-120"/>
+              </a:rPr>
+              <a:t>해결  </a:t>
+            </a:r>
+            <a:r>
+              <a:rPr lang="en-US" sz="1100" dirty="0">
+                <a:solidFill>
+                  <a:srgbClr val="3A4A5C"/>
+                </a:solidFill>
+                <a:latin typeface="맑은 고딕" pitchFamily="34" charset="0"/>
+                <a:ea typeface="맑은 고딕" pitchFamily="34" charset="-122"/>
+                <a:cs typeface="맑은 고딕" pitchFamily="34" charset="-120"/>
+              </a:rPr>
+              <a:t>크기를 단일 상수 BUFFER_SIZE로 통일해 배열·경계 계산이 같은 값을 참조</a:t>
+            </a:r>
+            <a:endParaRPr lang="en-US" sz="1100" dirty="0"/>
+          </a:p>
+        </p:txBody>
+      </p:sp>
+      <p:sp>
+        <p:nvSpPr>
+          <p:cNvPr id="11" name="Shape 9"/>
+          <p:cNvSpPr/>
+          <p:nvPr/>
+        </p:nvSpPr>
+        <p:spPr>
+          <a:xfrm>
+            <a:off x="4681728" y="1737360"/>
+            <a:ext cx="3913632" cy="2395728"/>
+          </a:xfrm>
+          <a:prstGeom prst="roundRect">
+            <a:avLst>
+              <a:gd name="adj" fmla="val 2290"/>
+            </a:avLst>
+          </a:prstGeom>
+          <a:solidFill>
+            <a:srgbClr val="FFFFFF"/>
+          </a:solidFill>
+          <a:ln w="12700">
+            <a:solidFill>
+              <a:srgbClr val="D5DDE5"/>
+            </a:solidFill>
+            <a:prstDash val="solid"/>
+          </a:ln>
+          <a:effectLst>
+            <a:outerShdw blurRad="88900" dist="38100" dir="5400000" algn="bl" rotWithShape="0">
+              <a:srgbClr val="000000">
+                <a:alpha val="10000"/>
+              </a:srgbClr>
+            </a:outerShdw>
+          </a:effectLst>
+        </p:spPr>
+        <p:txBody>
+          <a:bodyPr/>
+          <a:lstStyle/>
+          <a:p>
+            <a:endParaRPr lang="ko-KR" altLang="en-US"/>
+          </a:p>
+        </p:txBody>
+      </p:sp>
+      <p:sp>
+        <p:nvSpPr>
+          <p:cNvPr id="12" name="Shape 10"/>
+          <p:cNvSpPr/>
+          <p:nvPr/>
+        </p:nvSpPr>
+        <p:spPr>
+          <a:xfrm>
+            <a:off x="4901184" y="1938528"/>
+            <a:ext cx="310896" cy="310896"/>
+          </a:xfrm>
+          <a:prstGeom prst="ellipse">
+            <a:avLst/>
+          </a:prstGeom>
+          <a:solidFill>
+            <a:srgbClr val="0B6F66"/>
+          </a:solidFill>
+          <a:ln/>
+        </p:spPr>
+        <p:txBody>
+          <a:bodyPr/>
+          <a:lstStyle/>
+          <a:p>
+            <a:endParaRPr lang="ko-KR" altLang="en-US"/>
+          </a:p>
+        </p:txBody>
+      </p:sp>
+      <p:sp>
+        <p:nvSpPr>
+          <p:cNvPr id="13" name="Text 11"/>
+          <p:cNvSpPr/>
+          <p:nvPr/>
+        </p:nvSpPr>
+        <p:spPr>
+          <a:xfrm>
+            <a:off x="4901184" y="1938528"/>
+            <a:ext cx="310896" cy="310896"/>
+          </a:xfrm>
+          <a:prstGeom prst="rect">
+            <a:avLst/>
+          </a:prstGeom>
+          <a:noFill/>
+          <a:ln/>
+        </p:spPr>
+        <p:txBody>
+          <a:bodyPr wrap="square" lIns="0" tIns="0" rIns="0" bIns="0" rtlCol="0" anchor="ctr"/>
+          <a:lstStyle/>
+          <a:p>
+            <a:pPr marL="0" indent="0" algn="ctr">
+              <a:buNone/>
+            </a:pPr>
+            <a:r>
+              <a:rPr lang="en-US" sz="1300" b="1" dirty="0">
+                <a:solidFill>
+                  <a:srgbClr val="FFFFFF"/>
+                </a:solidFill>
+                <a:latin typeface="맑은 고딕" pitchFamily="34" charset="0"/>
+                <a:ea typeface="맑은 고딕" pitchFamily="34" charset="-122"/>
+                <a:cs typeface="맑은 고딕" pitchFamily="34" charset="-120"/>
+              </a:rPr>
+              <a:t>2</a:t>
+            </a:r>
+            <a:endParaRPr lang="en-US" sz="1300" dirty="0"/>
+          </a:p>
+        </p:txBody>
+      </p:sp>
+      <p:sp>
+        <p:nvSpPr>
+          <p:cNvPr id="14" name="Text 12"/>
+          <p:cNvSpPr/>
+          <p:nvPr/>
+        </p:nvSpPr>
+        <p:spPr>
+          <a:xfrm>
+            <a:off x="5303520" y="1920240"/>
+            <a:ext cx="3090672" cy="310896"/>
+          </a:xfrm>
+          <a:prstGeom prst="rect">
+            <a:avLst/>
+          </a:prstGeom>
+          <a:noFill/>
+          <a:ln/>
+        </p:spPr>
+        <p:txBody>
+          <a:bodyPr wrap="square" lIns="0" tIns="0" rIns="0" bIns="0" rtlCol="0" anchor="ctr"/>
+          <a:lstStyle/>
+          <a:p>
+            <a:pPr marL="0" indent="0">
+              <a:buNone/>
+            </a:pPr>
+            <a:r>
+              <a:rPr lang="en-US" sz="1500" b="1" dirty="0">
+                <a:solidFill>
+                  <a:srgbClr val="1E293B"/>
+                </a:solidFill>
+                <a:latin typeface="맑은 고딕" pitchFamily="34" charset="0"/>
+                <a:ea typeface="맑은 고딕" pitchFamily="34" charset="-122"/>
+                <a:cs typeface="맑은 고딕" pitchFamily="34" charset="-120"/>
+              </a:rPr>
+              <a:t>링 버퍼에서만 맵 깨짐</a:t>
+            </a:r>
+            <a:endParaRPr lang="en-US" sz="1500" dirty="0"/>
+          </a:p>
+        </p:txBody>
+      </p:sp>
+      <p:sp>
+        <p:nvSpPr>
+          <p:cNvPr id="15" name="Text 13"/>
+          <p:cNvSpPr/>
+          <p:nvPr/>
+        </p:nvSpPr>
+        <p:spPr>
+          <a:xfrm>
+            <a:off x="5303520" y="2231136"/>
+            <a:ext cx="3090672" cy="219456"/>
+          </a:xfrm>
+          <a:prstGeom prst="rect">
+            <a:avLst/>
+          </a:prstGeom>
+          <a:noFill/>
+          <a:ln/>
+        </p:spPr>
+        <p:txBody>
+          <a:bodyPr wrap="square" lIns="0" tIns="0" rIns="0" bIns="0" rtlCol="0" anchor="ctr"/>
+          <a:lstStyle/>
+          <a:p>
+            <a:pPr marL="0" indent="0">
+              <a:buNone/>
+            </a:pPr>
+            <a:r>
+              <a:rPr lang="en-US" sz="1050" dirty="0">
+                <a:solidFill>
+                  <a:srgbClr val="6B7A8D"/>
+                </a:solidFill>
+                <a:latin typeface="Consolas" pitchFamily="34" charset="0"/>
+                <a:ea typeface="Consolas" pitchFamily="34" charset="-122"/>
+                <a:cs typeface="Consolas" pitchFamily="34" charset="-120"/>
+              </a:rPr>
+              <a:t>초기 MapSnapshot &gt; 512B</a:t>
+            </a:r>
+            <a:endParaRPr lang="en-US" sz="1050" dirty="0"/>
+          </a:p>
+        </p:txBody>
+      </p:sp>
+      <p:sp>
+        <p:nvSpPr>
+          <p:cNvPr id="16" name="Text 14"/>
+          <p:cNvSpPr/>
+          <p:nvPr/>
+        </p:nvSpPr>
+        <p:spPr>
+          <a:xfrm>
+            <a:off x="4937760" y="2560320"/>
+            <a:ext cx="3401568" cy="1444752"/>
+          </a:xfrm>
+          <a:prstGeom prst="rect">
+            <a:avLst/>
+          </a:prstGeom>
+          <a:noFill/>
+          <a:ln/>
+        </p:spPr>
+        <p:txBody>
+          <a:bodyPr wrap="square" lIns="0" tIns="0" rIns="0" bIns="0" rtlCol="0" anchor="t"/>
+          <a:lstStyle/>
+          <a:p>
+            <a:pPr marL="0" indent="0">
+              <a:lnSpc>
+                <a:spcPct val="105000"/>
+              </a:lnSpc>
+              <a:buNone/>
+            </a:pPr>
+            <a:r>
+              <a:rPr lang="en-US" sz="1100" b="1" dirty="0">
+                <a:solidFill>
+                  <a:srgbClr val="B0413A"/>
+                </a:solidFill>
+                <a:latin typeface="맑은 고딕" pitchFamily="34" charset="0"/>
+                <a:ea typeface="맑은 고딕" pitchFamily="34" charset="-122"/>
+                <a:cs typeface="맑은 고딕" pitchFamily="34" charset="-120"/>
+              </a:rPr>
+              <a:t>증상  </a:t>
+            </a:r>
+            <a:r>
+              <a:rPr lang="en-US" sz="1100" dirty="0">
+                <a:solidFill>
+                  <a:srgbClr val="3A4A5C"/>
+                </a:solidFill>
+                <a:latin typeface="맑은 고딕" pitchFamily="34" charset="0"/>
+                <a:ea typeface="맑은 고딕" pitchFamily="34" charset="-122"/>
+                <a:cs typeface="맑은 고딕" pitchFamily="34" charset="-120"/>
+              </a:rPr>
+              <a:t>크래시 해결 후, 링 버퍼일 때만 클라이언트에서 맵이 일부만 렌더링</a:t>
+            </a:r>
+            <a:endParaRPr lang="en-US" sz="1100" dirty="0"/>
+          </a:p>
+          <a:p>
+            <a:pPr marL="0" indent="0">
+              <a:lnSpc>
+                <a:spcPct val="105000"/>
+              </a:lnSpc>
+              <a:buNone/>
+            </a:pPr>
+            <a:r>
+              <a:rPr lang="en-US" sz="1100" b="1" dirty="0">
+                <a:solidFill>
+                  <a:srgbClr val="1E293B"/>
+                </a:solidFill>
+                <a:latin typeface="맑은 고딕" pitchFamily="34" charset="0"/>
+                <a:ea typeface="맑은 고딕" pitchFamily="34" charset="-122"/>
+                <a:cs typeface="맑은 고딕" pitchFamily="34" charset="-120"/>
+              </a:rPr>
+              <a:t>원인  </a:t>
+            </a:r>
+            <a:r>
+              <a:rPr lang="en-US" sz="1100" dirty="0">
+                <a:solidFill>
+                  <a:srgbClr val="3A4A5C"/>
+                </a:solidFill>
+                <a:latin typeface="맑은 고딕" pitchFamily="34" charset="0"/>
+                <a:ea typeface="맑은 고딕" pitchFamily="34" charset="-122"/>
+                <a:cs typeface="맑은 고딕" pitchFamily="34" charset="-120"/>
+              </a:rPr>
+              <a:t>초기 맵 스냅샷 데이터가 512B를 초과 → 고정 크기 링 버퍼 상한에 걸려 일부만 적재</a:t>
+            </a:r>
+            <a:endParaRPr lang="en-US" sz="1100" dirty="0"/>
+          </a:p>
+          <a:p>
+            <a:pPr marL="0" indent="0">
+              <a:lnSpc>
+                <a:spcPct val="105000"/>
+              </a:lnSpc>
+              <a:buNone/>
+            </a:pPr>
+            <a:r>
+              <a:rPr lang="en-US" sz="1100" b="1" dirty="0">
+                <a:solidFill>
+                  <a:srgbClr val="0B6F66"/>
+                </a:solidFill>
+                <a:latin typeface="맑은 고딕" pitchFamily="34" charset="0"/>
+                <a:ea typeface="맑은 고딕" pitchFamily="34" charset="-122"/>
+                <a:cs typeface="맑은 고딕" pitchFamily="34" charset="-120"/>
+              </a:rPr>
+              <a:t>해결  </a:t>
+            </a:r>
+            <a:r>
+              <a:rPr lang="en-US" sz="1100" dirty="0">
+                <a:solidFill>
+                  <a:srgbClr val="3A4A5C"/>
+                </a:solidFill>
+                <a:latin typeface="맑은 고딕" pitchFamily="34" charset="0"/>
+                <a:ea typeface="맑은 고딕" pitchFamily="34" charset="-122"/>
+                <a:cs typeface="맑은 고딕" pitchFamily="34" charset="-120"/>
+              </a:rPr>
+              <a:t>가변 버퍼는 필요한 만큼 grow해 안전 전송. 링은 초기 대형 데이터용 상한·분할 정책이 필요함을 확인</a:t>
+            </a:r>
+            <a:endParaRPr lang="en-US" sz="1100" dirty="0"/>
+          </a:p>
+        </p:txBody>
+      </p:sp>
+      <p:sp>
+        <p:nvSpPr>
+          <p:cNvPr id="17" name="Shape 15"/>
+          <p:cNvSpPr/>
+          <p:nvPr/>
+        </p:nvSpPr>
+        <p:spPr>
+          <a:xfrm>
+            <a:off x="548640" y="4315968"/>
+            <a:ext cx="8046720" cy="603504"/>
+          </a:xfrm>
+          <a:prstGeom prst="roundRect">
+            <a:avLst>
+              <a:gd name="adj" fmla="val 9091"/>
+            </a:avLst>
+          </a:prstGeom>
+          <a:solidFill>
+            <a:srgbClr val="E7F2F1"/>
+          </a:solidFill>
+          <a:ln w="12700">
+            <a:solidFill>
+              <a:srgbClr val="5EEAD4"/>
+            </a:solidFill>
+            <a:prstDash val="solid"/>
+          </a:ln>
+        </p:spPr>
+        <p:txBody>
+          <a:bodyPr/>
+          <a:lstStyle/>
+          <a:p>
+            <a:endParaRPr lang="ko-KR" altLang="en-US"/>
+          </a:p>
+        </p:txBody>
+      </p:sp>
+      <p:sp>
+        <p:nvSpPr>
+          <p:cNvPr id="18" name="Text 16"/>
+          <p:cNvSpPr/>
+          <p:nvPr/>
+        </p:nvSpPr>
+        <p:spPr>
+          <a:xfrm>
+            <a:off x="777240" y="4425696"/>
+            <a:ext cx="7589520" cy="228600"/>
+          </a:xfrm>
+          <a:prstGeom prst="rect">
+            <a:avLst/>
+          </a:prstGeom>
+          <a:noFill/>
+          <a:ln/>
+        </p:spPr>
+        <p:txBody>
+          <a:bodyPr wrap="square" lIns="0" tIns="0" rIns="0" bIns="0" rtlCol="0" anchor="ctr"/>
+          <a:lstStyle/>
+          <a:p>
+            <a:pPr marL="0" indent="0">
+              <a:buNone/>
+            </a:pPr>
+            <a:r>
+              <a:rPr lang="en-US" sz="1050" b="1" kern="0" spc="150" dirty="0">
+                <a:solidFill>
+                  <a:srgbClr val="0B6F66"/>
+                </a:solidFill>
+                <a:latin typeface="맑은 고딕" pitchFamily="34" charset="0"/>
+                <a:ea typeface="맑은 고딕" pitchFamily="34" charset="-122"/>
+                <a:cs typeface="맑은 고딕" pitchFamily="34" charset="-120"/>
+              </a:rPr>
+              <a:t>배운 점</a:t>
+            </a:r>
+            <a:endParaRPr lang="en-US" sz="1050" dirty="0"/>
+          </a:p>
+        </p:txBody>
+      </p:sp>
+      <p:sp>
+        <p:nvSpPr>
+          <p:cNvPr id="19" name="Text 17"/>
+          <p:cNvSpPr/>
+          <p:nvPr/>
+        </p:nvSpPr>
+        <p:spPr>
+          <a:xfrm>
+            <a:off x="777240" y="4645152"/>
+            <a:ext cx="7589520" cy="164592"/>
+          </a:xfrm>
+          <a:prstGeom prst="rect">
+            <a:avLst/>
+          </a:prstGeom>
+          <a:noFill/>
+          <a:ln/>
+        </p:spPr>
+        <p:txBody>
+          <a:bodyPr wrap="square" lIns="0" tIns="0" rIns="0" bIns="0" rtlCol="0" anchor="t"/>
+          <a:lstStyle/>
+          <a:p>
+            <a:pPr marL="0" indent="0">
+              <a:lnSpc>
+                <a:spcPct val="102000"/>
+              </a:lnSpc>
+              <a:buNone/>
+            </a:pPr>
+            <a:r>
+              <a:rPr lang="en-US" sz="1300" dirty="0">
+                <a:solidFill>
+                  <a:srgbClr val="1E293B"/>
+                </a:solidFill>
+                <a:latin typeface="맑은 고딕" pitchFamily="34" charset="0"/>
+                <a:ea typeface="맑은 고딕" pitchFamily="34" charset="-122"/>
+                <a:cs typeface="맑은 고딕" pitchFamily="34" charset="-120"/>
+              </a:rPr>
+              <a:t>같은 512라도 '실패하는 방식'이 달랐습니다. 버퍼 크기는 단일 상수로 통일하고, 맵 스냅샷 같은 초기 대형 데이터는 고정 버퍼의 상한을 설계 단계에서 고려해야 합니다.</a:t>
+            </a:r>
+            <a:endParaRPr lang="en-US" sz="1300" dirty="0"/>
+          </a:p>
+        </p:txBody>
+      </p:sp>
+    </p:spTree>
+  </p:cSld>
+  <p:clrMapOvr>
+    <a:masterClrMapping/>
+  </p:clrMapOvr>
+</p:sld>
+</file>
+
+<file path=ppt/slides/slide15.xml><?xml version="1.0" encoding="utf-8"?>
+<p:sld xmlns:a="http://schemas.openxmlformats.org/drawingml/2006/main" xmlns:r="http://schemas.openxmlformats.org/officeDocument/2006/relationships" xmlns:p="http://schemas.openxmlformats.org/presentationml/2006/main">
+  <p:cSld>
     <p:bg>
       <p:bgPr>
         <a:solidFill>

--- a/portfolio/portfolio.pptx
+++ b/portfolio/portfolio.pptx
@@ -13830,6 +13830,36 @@
           </a:p>
         </p:txBody>
       </p:sp>
+      <p:pic>
+        <p:nvPicPr>
+          <p:cNvPr id="3" name="그림 2">
+            <a:extLst>
+              <a:ext uri="{FF2B5EF4-FFF2-40B4-BE49-F238E27FC236}">
+                <a16:creationId xmlns:a16="http://schemas.microsoft.com/office/drawing/2014/main" id="{CDBE73F6-163B-EFEA-1C97-89CE9B610830}"/>
+              </a:ext>
+            </a:extLst>
+          </p:cNvPr>
+          <p:cNvPicPr>
+            <a:picLocks noChangeAspect="1"/>
+          </p:cNvPicPr>
+          <p:nvPr/>
+        </p:nvPicPr>
+        <p:blipFill>
+          <a:blip r:embed="rId3"/>
+          <a:stretch>
+            <a:fillRect/>
+          </a:stretch>
+        </p:blipFill>
+        <p:spPr>
+          <a:xfrm>
+            <a:off x="5029200" y="1645920"/>
+            <a:ext cx="3609285" cy="2247127"/>
+          </a:xfrm>
+          <a:prstGeom prst="rect">
+            <a:avLst/>
+          </a:prstGeom>
+        </p:spPr>
+      </p:pic>
     </p:spTree>
   </p:cSld>
   <p:clrMapOvr>
